--- a/宣道詩/(宣道詩113)在我心裡常吟讚美歌.pptx
+++ b/宣道詩/(宣道詩113)在我心裡常吟讚美歌.pptx
@@ -173,7 +173,7 @@
           <a:lstStyle/>
           <a:p>
             <a:r>
-              <a:rPr lang="en-US" altLang="zh-TW" smtClean="0"/>
+              <a:rPr lang="en-US" altLang="zh-TW"/>
               <a:t>Click to edit Master title style</a:t>
             </a:r>
             <a:endParaRPr lang="zh-TW" altLang="en-US"/>
@@ -292,7 +292,7 @@
           </a:lstStyle>
           <a:p>
             <a:r>
-              <a:rPr lang="en-US" altLang="zh-TW" smtClean="0"/>
+              <a:rPr lang="en-US" altLang="zh-TW"/>
               <a:t>Click to edit Master subtitle style</a:t>
             </a:r>
             <a:endParaRPr lang="zh-TW" altLang="en-US"/>
@@ -316,7 +316,7 @@
           <a:p>
             <a:fld id="{A2B5D7EE-74BC-4BDC-AE2A-3936D1310525}" type="datetimeFigureOut">
               <a:rPr lang="zh-TW" altLang="en-US" smtClean="0"/>
-              <a:t>2021/11/30</a:t>
+              <a:t>2026/6/27</a:t>
             </a:fld>
             <a:endParaRPr lang="zh-TW" altLang="en-US"/>
           </a:p>
@@ -405,7 +405,7 @@
           <a:lstStyle/>
           <a:p>
             <a:r>
-              <a:rPr lang="en-US" altLang="zh-TW" smtClean="0"/>
+              <a:rPr lang="en-US" altLang="zh-TW"/>
               <a:t>Click to edit Master title style</a:t>
             </a:r>
             <a:endParaRPr lang="zh-TW" altLang="en-US"/>
@@ -429,35 +429,35 @@
           <a:p>
             <a:pPr lvl="0"/>
             <a:r>
-              <a:rPr lang="en-US" altLang="zh-TW" smtClean="0"/>
+              <a:rPr lang="en-US" altLang="zh-TW"/>
               <a:t>Click to edit Master text styles</a:t>
             </a:r>
           </a:p>
           <a:p>
             <a:pPr lvl="1"/>
             <a:r>
-              <a:rPr lang="en-US" altLang="zh-TW" smtClean="0"/>
+              <a:rPr lang="en-US" altLang="zh-TW"/>
               <a:t>Second level</a:t>
             </a:r>
           </a:p>
           <a:p>
             <a:pPr lvl="2"/>
             <a:r>
-              <a:rPr lang="en-US" altLang="zh-TW" smtClean="0"/>
+              <a:rPr lang="en-US" altLang="zh-TW"/>
               <a:t>Third level</a:t>
             </a:r>
           </a:p>
           <a:p>
             <a:pPr lvl="3"/>
             <a:r>
-              <a:rPr lang="en-US" altLang="zh-TW" smtClean="0"/>
+              <a:rPr lang="en-US" altLang="zh-TW"/>
               <a:t>Fourth level</a:t>
             </a:r>
           </a:p>
           <a:p>
             <a:pPr lvl="4"/>
             <a:r>
-              <a:rPr lang="en-US" altLang="zh-TW" smtClean="0"/>
+              <a:rPr lang="en-US" altLang="zh-TW"/>
               <a:t>Fifth level</a:t>
             </a:r>
             <a:endParaRPr lang="zh-TW" altLang="en-US"/>
@@ -481,7 +481,7 @@
           <a:p>
             <a:fld id="{A2B5D7EE-74BC-4BDC-AE2A-3936D1310525}" type="datetimeFigureOut">
               <a:rPr lang="zh-TW" altLang="en-US" smtClean="0"/>
-              <a:t>2021/11/30</a:t>
+              <a:t>2026/6/27</a:t>
             </a:fld>
             <a:endParaRPr lang="zh-TW" altLang="en-US"/>
           </a:p>
@@ -575,7 +575,7 @@
           <a:lstStyle/>
           <a:p>
             <a:r>
-              <a:rPr lang="en-US" altLang="zh-TW" smtClean="0"/>
+              <a:rPr lang="en-US" altLang="zh-TW"/>
               <a:t>Click to edit Master title style</a:t>
             </a:r>
             <a:endParaRPr lang="zh-TW" altLang="en-US"/>
@@ -604,35 +604,35 @@
           <a:p>
             <a:pPr lvl="0"/>
             <a:r>
-              <a:rPr lang="en-US" altLang="zh-TW" smtClean="0"/>
+              <a:rPr lang="en-US" altLang="zh-TW"/>
               <a:t>Click to edit Master text styles</a:t>
             </a:r>
           </a:p>
           <a:p>
             <a:pPr lvl="1"/>
             <a:r>
-              <a:rPr lang="en-US" altLang="zh-TW" smtClean="0"/>
+              <a:rPr lang="en-US" altLang="zh-TW"/>
               <a:t>Second level</a:t>
             </a:r>
           </a:p>
           <a:p>
             <a:pPr lvl="2"/>
             <a:r>
-              <a:rPr lang="en-US" altLang="zh-TW" smtClean="0"/>
+              <a:rPr lang="en-US" altLang="zh-TW"/>
               <a:t>Third level</a:t>
             </a:r>
           </a:p>
           <a:p>
             <a:pPr lvl="3"/>
             <a:r>
-              <a:rPr lang="en-US" altLang="zh-TW" smtClean="0"/>
+              <a:rPr lang="en-US" altLang="zh-TW"/>
               <a:t>Fourth level</a:t>
             </a:r>
           </a:p>
           <a:p>
             <a:pPr lvl="4"/>
             <a:r>
-              <a:rPr lang="en-US" altLang="zh-TW" smtClean="0"/>
+              <a:rPr lang="en-US" altLang="zh-TW"/>
               <a:t>Fifth level</a:t>
             </a:r>
             <a:endParaRPr lang="zh-TW" altLang="en-US"/>
@@ -656,7 +656,7 @@
           <a:p>
             <a:fld id="{A2B5D7EE-74BC-4BDC-AE2A-3936D1310525}" type="datetimeFigureOut">
               <a:rPr lang="zh-TW" altLang="en-US" smtClean="0"/>
-              <a:t>2021/11/30</a:t>
+              <a:t>2026/6/27</a:t>
             </a:fld>
             <a:endParaRPr lang="zh-TW" altLang="en-US"/>
           </a:p>
@@ -745,7 +745,7 @@
           <a:lstStyle/>
           <a:p>
             <a:r>
-              <a:rPr lang="en-US" altLang="zh-TW" smtClean="0"/>
+              <a:rPr lang="en-US" altLang="zh-TW"/>
               <a:t>Click to edit Master title style</a:t>
             </a:r>
             <a:endParaRPr lang="zh-TW" altLang="en-US"/>
@@ -769,35 +769,35 @@
           <a:p>
             <a:pPr lvl="0"/>
             <a:r>
-              <a:rPr lang="en-US" altLang="zh-TW" smtClean="0"/>
+              <a:rPr lang="en-US" altLang="zh-TW"/>
               <a:t>Click to edit Master text styles</a:t>
             </a:r>
           </a:p>
           <a:p>
             <a:pPr lvl="1"/>
             <a:r>
-              <a:rPr lang="en-US" altLang="zh-TW" smtClean="0"/>
+              <a:rPr lang="en-US" altLang="zh-TW"/>
               <a:t>Second level</a:t>
             </a:r>
           </a:p>
           <a:p>
             <a:pPr lvl="2"/>
             <a:r>
-              <a:rPr lang="en-US" altLang="zh-TW" smtClean="0"/>
+              <a:rPr lang="en-US" altLang="zh-TW"/>
               <a:t>Third level</a:t>
             </a:r>
           </a:p>
           <a:p>
             <a:pPr lvl="3"/>
             <a:r>
-              <a:rPr lang="en-US" altLang="zh-TW" smtClean="0"/>
+              <a:rPr lang="en-US" altLang="zh-TW"/>
               <a:t>Fourth level</a:t>
             </a:r>
           </a:p>
           <a:p>
             <a:pPr lvl="4"/>
             <a:r>
-              <a:rPr lang="en-US" altLang="zh-TW" smtClean="0"/>
+              <a:rPr lang="en-US" altLang="zh-TW"/>
               <a:t>Fifth level</a:t>
             </a:r>
             <a:endParaRPr lang="zh-TW" altLang="en-US"/>
@@ -821,7 +821,7 @@
           <a:p>
             <a:fld id="{A2B5D7EE-74BC-4BDC-AE2A-3936D1310525}" type="datetimeFigureOut">
               <a:rPr lang="zh-TW" altLang="en-US" smtClean="0"/>
-              <a:t>2021/11/30</a:t>
+              <a:t>2026/6/27</a:t>
             </a:fld>
             <a:endParaRPr lang="zh-TW" altLang="en-US"/>
           </a:p>
@@ -919,7 +919,7 @@
           </a:lstStyle>
           <a:p>
             <a:r>
-              <a:rPr lang="en-US" altLang="zh-TW" smtClean="0"/>
+              <a:rPr lang="en-US" altLang="zh-TW"/>
               <a:t>Click to edit Master title style</a:t>
             </a:r>
             <a:endParaRPr lang="zh-TW" altLang="en-US"/>
@@ -1039,7 +1039,7 @@
           <a:p>
             <a:pPr lvl="0"/>
             <a:r>
-              <a:rPr lang="en-US" altLang="zh-TW" smtClean="0"/>
+              <a:rPr lang="en-US" altLang="zh-TW"/>
               <a:t>Click to edit Master text styles</a:t>
             </a:r>
           </a:p>
@@ -1062,7 +1062,7 @@
           <a:p>
             <a:fld id="{A2B5D7EE-74BC-4BDC-AE2A-3936D1310525}" type="datetimeFigureOut">
               <a:rPr lang="zh-TW" altLang="en-US" smtClean="0"/>
-              <a:t>2021/11/30</a:t>
+              <a:t>2026/6/27</a:t>
             </a:fld>
             <a:endParaRPr lang="zh-TW" altLang="en-US"/>
           </a:p>
@@ -1151,7 +1151,7 @@
           <a:lstStyle/>
           <a:p>
             <a:r>
-              <a:rPr lang="en-US" altLang="zh-TW" smtClean="0"/>
+              <a:rPr lang="en-US" altLang="zh-TW"/>
               <a:t>Click to edit Master title style</a:t>
             </a:r>
             <a:endParaRPr lang="zh-TW" altLang="en-US"/>
@@ -1208,35 +1208,35 @@
           <a:p>
             <a:pPr lvl="0"/>
             <a:r>
-              <a:rPr lang="en-US" altLang="zh-TW" smtClean="0"/>
+              <a:rPr lang="en-US" altLang="zh-TW"/>
               <a:t>Click to edit Master text styles</a:t>
             </a:r>
           </a:p>
           <a:p>
             <a:pPr lvl="1"/>
             <a:r>
-              <a:rPr lang="en-US" altLang="zh-TW" smtClean="0"/>
+              <a:rPr lang="en-US" altLang="zh-TW"/>
               <a:t>Second level</a:t>
             </a:r>
           </a:p>
           <a:p>
             <a:pPr lvl="2"/>
             <a:r>
-              <a:rPr lang="en-US" altLang="zh-TW" smtClean="0"/>
+              <a:rPr lang="en-US" altLang="zh-TW"/>
               <a:t>Third level</a:t>
             </a:r>
           </a:p>
           <a:p>
             <a:pPr lvl="3"/>
             <a:r>
-              <a:rPr lang="en-US" altLang="zh-TW" smtClean="0"/>
+              <a:rPr lang="en-US" altLang="zh-TW"/>
               <a:t>Fourth level</a:t>
             </a:r>
           </a:p>
           <a:p>
             <a:pPr lvl="4"/>
             <a:r>
-              <a:rPr lang="en-US" altLang="zh-TW" smtClean="0"/>
+              <a:rPr lang="en-US" altLang="zh-TW"/>
               <a:t>Fifth level</a:t>
             </a:r>
             <a:endParaRPr lang="zh-TW" altLang="en-US"/>
@@ -1293,35 +1293,35 @@
           <a:p>
             <a:pPr lvl="0"/>
             <a:r>
-              <a:rPr lang="en-US" altLang="zh-TW" smtClean="0"/>
+              <a:rPr lang="en-US" altLang="zh-TW"/>
               <a:t>Click to edit Master text styles</a:t>
             </a:r>
           </a:p>
           <a:p>
             <a:pPr lvl="1"/>
             <a:r>
-              <a:rPr lang="en-US" altLang="zh-TW" smtClean="0"/>
+              <a:rPr lang="en-US" altLang="zh-TW"/>
               <a:t>Second level</a:t>
             </a:r>
           </a:p>
           <a:p>
             <a:pPr lvl="2"/>
             <a:r>
-              <a:rPr lang="en-US" altLang="zh-TW" smtClean="0"/>
+              <a:rPr lang="en-US" altLang="zh-TW"/>
               <a:t>Third level</a:t>
             </a:r>
           </a:p>
           <a:p>
             <a:pPr lvl="3"/>
             <a:r>
-              <a:rPr lang="en-US" altLang="zh-TW" smtClean="0"/>
+              <a:rPr lang="en-US" altLang="zh-TW"/>
               <a:t>Fourth level</a:t>
             </a:r>
           </a:p>
           <a:p>
             <a:pPr lvl="4"/>
             <a:r>
-              <a:rPr lang="en-US" altLang="zh-TW" smtClean="0"/>
+              <a:rPr lang="en-US" altLang="zh-TW"/>
               <a:t>Fifth level</a:t>
             </a:r>
             <a:endParaRPr lang="zh-TW" altLang="en-US"/>
@@ -1345,7 +1345,7 @@
           <a:p>
             <a:fld id="{A2B5D7EE-74BC-4BDC-AE2A-3936D1310525}" type="datetimeFigureOut">
               <a:rPr lang="zh-TW" altLang="en-US" smtClean="0"/>
-              <a:t>2021/11/30</a:t>
+              <a:t>2026/6/27</a:t>
             </a:fld>
             <a:endParaRPr lang="zh-TW" altLang="en-US"/>
           </a:p>
@@ -1438,7 +1438,7 @@
           </a:lstStyle>
           <a:p>
             <a:r>
-              <a:rPr lang="en-US" altLang="zh-TW" smtClean="0"/>
+              <a:rPr lang="en-US" altLang="zh-TW"/>
               <a:t>Click to edit Master title style</a:t>
             </a:r>
             <a:endParaRPr lang="zh-TW" altLang="en-US"/>
@@ -1504,7 +1504,7 @@
           <a:p>
             <a:pPr lvl="0"/>
             <a:r>
-              <a:rPr lang="en-US" altLang="zh-TW" smtClean="0"/>
+              <a:rPr lang="en-US" altLang="zh-TW"/>
               <a:t>Click to edit Master text styles</a:t>
             </a:r>
           </a:p>
@@ -1560,35 +1560,35 @@
           <a:p>
             <a:pPr lvl="0"/>
             <a:r>
-              <a:rPr lang="en-US" altLang="zh-TW" smtClean="0"/>
+              <a:rPr lang="en-US" altLang="zh-TW"/>
               <a:t>Click to edit Master text styles</a:t>
             </a:r>
           </a:p>
           <a:p>
             <a:pPr lvl="1"/>
             <a:r>
-              <a:rPr lang="en-US" altLang="zh-TW" smtClean="0"/>
+              <a:rPr lang="en-US" altLang="zh-TW"/>
               <a:t>Second level</a:t>
             </a:r>
           </a:p>
           <a:p>
             <a:pPr lvl="2"/>
             <a:r>
-              <a:rPr lang="en-US" altLang="zh-TW" smtClean="0"/>
+              <a:rPr lang="en-US" altLang="zh-TW"/>
               <a:t>Third level</a:t>
             </a:r>
           </a:p>
           <a:p>
             <a:pPr lvl="3"/>
             <a:r>
-              <a:rPr lang="en-US" altLang="zh-TW" smtClean="0"/>
+              <a:rPr lang="en-US" altLang="zh-TW"/>
               <a:t>Fourth level</a:t>
             </a:r>
           </a:p>
           <a:p>
             <a:pPr lvl="4"/>
             <a:r>
-              <a:rPr lang="en-US" altLang="zh-TW" smtClean="0"/>
+              <a:rPr lang="en-US" altLang="zh-TW"/>
               <a:t>Fifth level</a:t>
             </a:r>
             <a:endParaRPr lang="zh-TW" altLang="en-US"/>
@@ -1654,7 +1654,7 @@
           <a:p>
             <a:pPr lvl="0"/>
             <a:r>
-              <a:rPr lang="en-US" altLang="zh-TW" smtClean="0"/>
+              <a:rPr lang="en-US" altLang="zh-TW"/>
               <a:t>Click to edit Master text styles</a:t>
             </a:r>
           </a:p>
@@ -1710,35 +1710,35 @@
           <a:p>
             <a:pPr lvl="0"/>
             <a:r>
-              <a:rPr lang="en-US" altLang="zh-TW" smtClean="0"/>
+              <a:rPr lang="en-US" altLang="zh-TW"/>
               <a:t>Click to edit Master text styles</a:t>
             </a:r>
           </a:p>
           <a:p>
             <a:pPr lvl="1"/>
             <a:r>
-              <a:rPr lang="en-US" altLang="zh-TW" smtClean="0"/>
+              <a:rPr lang="en-US" altLang="zh-TW"/>
               <a:t>Second level</a:t>
             </a:r>
           </a:p>
           <a:p>
             <a:pPr lvl="2"/>
             <a:r>
-              <a:rPr lang="en-US" altLang="zh-TW" smtClean="0"/>
+              <a:rPr lang="en-US" altLang="zh-TW"/>
               <a:t>Third level</a:t>
             </a:r>
           </a:p>
           <a:p>
             <a:pPr lvl="3"/>
             <a:r>
-              <a:rPr lang="en-US" altLang="zh-TW" smtClean="0"/>
+              <a:rPr lang="en-US" altLang="zh-TW"/>
               <a:t>Fourth level</a:t>
             </a:r>
           </a:p>
           <a:p>
             <a:pPr lvl="4"/>
             <a:r>
-              <a:rPr lang="en-US" altLang="zh-TW" smtClean="0"/>
+              <a:rPr lang="en-US" altLang="zh-TW"/>
               <a:t>Fifth level</a:t>
             </a:r>
             <a:endParaRPr lang="zh-TW" altLang="en-US"/>
@@ -1762,7 +1762,7 @@
           <a:p>
             <a:fld id="{A2B5D7EE-74BC-4BDC-AE2A-3936D1310525}" type="datetimeFigureOut">
               <a:rPr lang="zh-TW" altLang="en-US" smtClean="0"/>
-              <a:t>2021/11/30</a:t>
+              <a:t>2026/6/27</a:t>
             </a:fld>
             <a:endParaRPr lang="zh-TW" altLang="en-US"/>
           </a:p>
@@ -1851,7 +1851,7 @@
           <a:lstStyle/>
           <a:p>
             <a:r>
-              <a:rPr lang="en-US" altLang="zh-TW" smtClean="0"/>
+              <a:rPr lang="en-US" altLang="zh-TW"/>
               <a:t>Click to edit Master title style</a:t>
             </a:r>
             <a:endParaRPr lang="zh-TW" altLang="en-US"/>
@@ -1875,7 +1875,7 @@
           <a:p>
             <a:fld id="{A2B5D7EE-74BC-4BDC-AE2A-3936D1310525}" type="datetimeFigureOut">
               <a:rPr lang="zh-TW" altLang="en-US" smtClean="0"/>
-              <a:t>2021/11/30</a:t>
+              <a:t>2026/6/27</a:t>
             </a:fld>
             <a:endParaRPr lang="zh-TW" altLang="en-US"/>
           </a:p>
@@ -1965,7 +1965,7 @@
           <a:p>
             <a:fld id="{A2B5D7EE-74BC-4BDC-AE2A-3936D1310525}" type="datetimeFigureOut">
               <a:rPr lang="zh-TW" altLang="en-US" smtClean="0"/>
-              <a:t>2021/11/30</a:t>
+              <a:t>2026/6/27</a:t>
             </a:fld>
             <a:endParaRPr lang="zh-TW" altLang="en-US"/>
           </a:p>
@@ -2063,7 +2063,7 @@
           </a:lstStyle>
           <a:p>
             <a:r>
-              <a:rPr lang="en-US" altLang="zh-TW" smtClean="0"/>
+              <a:rPr lang="en-US" altLang="zh-TW"/>
               <a:t>Click to edit Master title style</a:t>
             </a:r>
             <a:endParaRPr lang="zh-TW" altLang="en-US"/>
@@ -2120,35 +2120,35 @@
           <a:p>
             <a:pPr lvl="0"/>
             <a:r>
-              <a:rPr lang="en-US" altLang="zh-TW" smtClean="0"/>
+              <a:rPr lang="en-US" altLang="zh-TW"/>
               <a:t>Click to edit Master text styles</a:t>
             </a:r>
           </a:p>
           <a:p>
             <a:pPr lvl="1"/>
             <a:r>
-              <a:rPr lang="en-US" altLang="zh-TW" smtClean="0"/>
+              <a:rPr lang="en-US" altLang="zh-TW"/>
               <a:t>Second level</a:t>
             </a:r>
           </a:p>
           <a:p>
             <a:pPr lvl="2"/>
             <a:r>
-              <a:rPr lang="en-US" altLang="zh-TW" smtClean="0"/>
+              <a:rPr lang="en-US" altLang="zh-TW"/>
               <a:t>Third level</a:t>
             </a:r>
           </a:p>
           <a:p>
             <a:pPr lvl="3"/>
             <a:r>
-              <a:rPr lang="en-US" altLang="zh-TW" smtClean="0"/>
+              <a:rPr lang="en-US" altLang="zh-TW"/>
               <a:t>Fourth level</a:t>
             </a:r>
           </a:p>
           <a:p>
             <a:pPr lvl="4"/>
             <a:r>
-              <a:rPr lang="en-US" altLang="zh-TW" smtClean="0"/>
+              <a:rPr lang="en-US" altLang="zh-TW"/>
               <a:t>Fifth level</a:t>
             </a:r>
             <a:endParaRPr lang="zh-TW" altLang="en-US"/>
@@ -2214,7 +2214,7 @@
           <a:p>
             <a:pPr lvl="0"/>
             <a:r>
-              <a:rPr lang="en-US" altLang="zh-TW" smtClean="0"/>
+              <a:rPr lang="en-US" altLang="zh-TW"/>
               <a:t>Click to edit Master text styles</a:t>
             </a:r>
           </a:p>
@@ -2237,7 +2237,7 @@
           <a:p>
             <a:fld id="{A2B5D7EE-74BC-4BDC-AE2A-3936D1310525}" type="datetimeFigureOut">
               <a:rPr lang="zh-TW" altLang="en-US" smtClean="0"/>
-              <a:t>2021/11/30</a:t>
+              <a:t>2026/6/27</a:t>
             </a:fld>
             <a:endParaRPr lang="zh-TW" altLang="en-US"/>
           </a:p>
@@ -2335,7 +2335,7 @@
           </a:lstStyle>
           <a:p>
             <a:r>
-              <a:rPr lang="en-US" altLang="zh-TW" smtClean="0"/>
+              <a:rPr lang="en-US" altLang="zh-TW"/>
               <a:t>Click to edit Master title style</a:t>
             </a:r>
             <a:endParaRPr lang="zh-TW" altLang="en-US"/>
@@ -2400,7 +2400,7 @@
           </a:lstStyle>
           <a:p>
             <a:r>
-              <a:rPr lang="en-US" altLang="zh-TW" smtClean="0"/>
+              <a:rPr lang="en-US" altLang="zh-TW"/>
               <a:t>Click icon to add picture</a:t>
             </a:r>
             <a:endParaRPr lang="zh-TW" altLang="en-US"/>
@@ -2466,7 +2466,7 @@
           <a:p>
             <a:pPr lvl="0"/>
             <a:r>
-              <a:rPr lang="en-US" altLang="zh-TW" smtClean="0"/>
+              <a:rPr lang="en-US" altLang="zh-TW"/>
               <a:t>Click to edit Master text styles</a:t>
             </a:r>
           </a:p>
@@ -2489,7 +2489,7 @@
           <a:p>
             <a:fld id="{A2B5D7EE-74BC-4BDC-AE2A-3936D1310525}" type="datetimeFigureOut">
               <a:rPr lang="zh-TW" altLang="en-US" smtClean="0"/>
-              <a:t>2021/11/30</a:t>
+              <a:t>2026/6/27</a:t>
             </a:fld>
             <a:endParaRPr lang="zh-TW" altLang="en-US"/>
           </a:p>
@@ -2598,10 +2598,9 @@
           <a:lstStyle/>
           <a:p>
             <a:r>
-              <a:rPr lang="zh-TW" altLang="en-US" smtClean="0"/>
+              <a:rPr lang="zh-TW" altLang="en-US"/>
               <a:t>按一下以編輯母片標題樣式</a:t>
             </a:r>
-            <a:endParaRPr lang="zh-TW" altLang="en-US"/>
           </a:p>
         </p:txBody>
       </p:sp>
@@ -2632,38 +2631,37 @@
           <a:p>
             <a:pPr lvl="0"/>
             <a:r>
-              <a:rPr lang="zh-TW" altLang="en-US" smtClean="0"/>
+              <a:rPr lang="zh-TW" altLang="en-US"/>
               <a:t>按一下以編輯母片文字樣式</a:t>
             </a:r>
           </a:p>
           <a:p>
             <a:pPr lvl="1"/>
             <a:r>
-              <a:rPr lang="zh-TW" altLang="en-US" smtClean="0"/>
+              <a:rPr lang="zh-TW" altLang="en-US"/>
               <a:t>第二層</a:t>
             </a:r>
           </a:p>
           <a:p>
             <a:pPr lvl="2"/>
             <a:r>
-              <a:rPr lang="zh-TW" altLang="en-US" smtClean="0"/>
+              <a:rPr lang="zh-TW" altLang="en-US"/>
               <a:t>第三層</a:t>
             </a:r>
           </a:p>
           <a:p>
             <a:pPr lvl="3"/>
             <a:r>
-              <a:rPr lang="zh-TW" altLang="en-US" smtClean="0"/>
+              <a:rPr lang="zh-TW" altLang="en-US"/>
               <a:t>第四層</a:t>
             </a:r>
           </a:p>
           <a:p>
             <a:pPr lvl="4"/>
             <a:r>
-              <a:rPr lang="zh-TW" altLang="en-US" smtClean="0"/>
+              <a:rPr lang="zh-TW" altLang="en-US"/>
               <a:t>第五層</a:t>
             </a:r>
-            <a:endParaRPr lang="zh-TW" altLang="en-US"/>
           </a:p>
         </p:txBody>
       </p:sp>
@@ -2702,7 +2700,7 @@
           <a:p>
             <a:fld id="{A2B5D7EE-74BC-4BDC-AE2A-3936D1310525}" type="datetimeFigureOut">
               <a:rPr lang="zh-TW" altLang="en-US" smtClean="0"/>
-              <a:t>2021/11/30</a:t>
+              <a:t>2026/6/27</a:t>
             </a:fld>
             <a:endParaRPr lang="zh-TW" altLang="en-US"/>
           </a:p>
@@ -3095,7 +3093,7 @@
           <a:lstStyle/>
           <a:p>
             <a:r>
-              <a:rPr lang="zh-CN" altLang="en-US" sz="4000" b="1" u="sng" dirty="0" smtClean="0">
+              <a:rPr lang="zh-CN" altLang="en-US" sz="4000" b="1" u="sng" dirty="0">
                 <a:solidFill>
                   <a:srgbClr val="660033"/>
                 </a:solidFill>
@@ -3112,7 +3110,7 @@
               <a:t>宣道詩 </a:t>
             </a:r>
             <a:r>
-              <a:rPr lang="en-US" altLang="zh-CN" sz="4000" b="1" u="sng" dirty="0" smtClean="0">
+              <a:rPr lang="en-US" altLang="zh-CN" sz="4000" b="1" u="sng" dirty="0">
                 <a:solidFill>
                   <a:srgbClr val="660033"/>
                 </a:solidFill>
@@ -3128,25 +3126,8 @@
               </a:rPr>
               <a:t>113</a:t>
             </a:r>
-            <a:r>
-              <a:rPr lang="en-US" altLang="zh-CN" sz="5400" b="1" i="1" dirty="0" smtClean="0">
-                <a:solidFill>
-                  <a:srgbClr val="660033"/>
-                </a:solidFill>
-                <a:effectLst>
-                  <a:outerShdw blurRad="38100" dist="38100" dir="2700000" algn="tl">
-                    <a:srgbClr val="000000">
-                      <a:alpha val="43137"/>
-                    </a:srgbClr>
-                  </a:outerShdw>
-                </a:effectLst>
-                <a:latin typeface="微軟正黑體" pitchFamily="34" charset="-120"/>
-                <a:ea typeface="微軟正黑體" pitchFamily="34" charset="-120"/>
-              </a:rPr>
-              <a:t/>
-            </a:r>
             <a:br>
-              <a:rPr lang="en-US" altLang="zh-CN" sz="5400" b="1" i="1" dirty="0" smtClean="0">
+              <a:rPr lang="en-US" altLang="zh-CN" sz="5400" b="1" i="1" dirty="0">
                 <a:solidFill>
                   <a:srgbClr val="660033"/>
                 </a:solidFill>
@@ -3162,7 +3143,7 @@
               </a:rPr>
             </a:br>
             <a:r>
-              <a:rPr lang="zh-TW" altLang="en-US" sz="6000" b="1" dirty="0" smtClean="0">
+              <a:rPr lang="zh-TW" altLang="en-US" sz="6000" b="1" dirty="0">
                 <a:solidFill>
                   <a:srgbClr val="000066"/>
                 </a:solidFill>
@@ -3176,24 +3157,7 @@
                 <a:latin typeface="微軟正黑體" pitchFamily="34" charset="-120"/>
                 <a:ea typeface="微軟正黑體" pitchFamily="34" charset="-120"/>
               </a:rPr>
-              <a:t>在</a:t>
-            </a:r>
-            <a:r>
-              <a:rPr lang="zh-TW" altLang="en-US" sz="6000" b="1" dirty="0">
-                <a:solidFill>
-                  <a:srgbClr val="000066"/>
-                </a:solidFill>
-                <a:effectLst>
-                  <a:outerShdw blurRad="38100" dist="38100" dir="2700000" algn="tl">
-                    <a:srgbClr val="000000">
-                      <a:alpha val="43137"/>
-                    </a:srgbClr>
-                  </a:outerShdw>
-                </a:effectLst>
-                <a:latin typeface="微軟正黑體" pitchFamily="34" charset="-120"/>
-                <a:ea typeface="微軟正黑體" pitchFamily="34" charset="-120"/>
-              </a:rPr>
-              <a:t>我心裡常吟讚美歌</a:t>
+              <a:t>在我心裡常吟讚美歌</a:t>
             </a:r>
           </a:p>
         </p:txBody>
@@ -3208,13 +3172,6 @@
   <p:clrMapOvr>
     <a:masterClrMapping/>
   </p:clrMapOvr>
-  <p:timing>
-    <p:tnLst>
-      <p:par>
-        <p:cTn id="1" dur="indefinite" restart="never" nodeType="tmRoot"/>
-      </p:par>
-    </p:tnLst>
-  </p:timing>
 </p:sld>
 </file>
 
@@ -3326,12 +3283,12 @@
           <a:p>
             <a:pPr algn="ctr"/>
             <a:r>
-              <a:rPr lang="en-US" sz="3600" b="1" dirty="0" smtClean="0">
+              <a:rPr lang="en-US" sz="3600" b="1" dirty="0">
                 <a:solidFill>
                   <a:srgbClr val="000066"/>
                 </a:solidFill>
               </a:rPr>
-              <a:t>( 3 )</a:t>
+              <a:t>( 3 / 3 )</a:t>
             </a:r>
             <a:endParaRPr lang="vi-VN" sz="3600" b="1" dirty="0">
               <a:solidFill>
@@ -3351,13 +3308,6 @@
   <p:clrMapOvr>
     <a:masterClrMapping/>
   </p:clrMapOvr>
-  <p:timing>
-    <p:tnLst>
-      <p:par>
-        <p:cTn id="1" dur="indefinite" restart="never" nodeType="tmRoot"/>
-      </p:par>
-    </p:tnLst>
-  </p:timing>
 </p:sld>
 </file>
 
@@ -3462,12 +3412,12 @@
           <a:p>
             <a:pPr algn="ctr"/>
             <a:r>
-              <a:rPr lang="en-US" sz="3600" b="1" dirty="0" smtClean="0">
+              <a:rPr lang="en-US" sz="3600" b="1" dirty="0">
                 <a:solidFill>
                   <a:srgbClr val="000066"/>
                 </a:solidFill>
               </a:rPr>
-              <a:t>( 3 )</a:t>
+              <a:t>( 3 / 3 )</a:t>
             </a:r>
             <a:endParaRPr lang="vi-VN" sz="3600" b="1" dirty="0">
               <a:solidFill>
@@ -3487,13 +3437,6 @@
   <p:clrMapOvr>
     <a:masterClrMapping/>
   </p:clrMapOvr>
-  <p:timing>
-    <p:tnLst>
-      <p:par>
-        <p:cTn id="1" dur="indefinite" restart="never" nodeType="tmRoot"/>
-      </p:par>
-    </p:tnLst>
-  </p:timing>
 </p:sld>
 </file>
 
@@ -3547,17 +3490,7 @@
                 <a:latin typeface="Microsoft JhengHei" pitchFamily="34" charset="-120"/>
                 <a:ea typeface="Microsoft JhengHei" pitchFamily="34" charset="-120"/>
               </a:rPr>
-              <a:t>在我心裡常吟讚</a:t>
-            </a:r>
-            <a:r>
-              <a:rPr lang="zh-TW" altLang="en-US" sz="4800" b="1" dirty="0">
-                <a:solidFill>
-                  <a:srgbClr val="000066"/>
-                </a:solidFill>
-                <a:latin typeface="Microsoft JhengHei" pitchFamily="34" charset="-120"/>
-                <a:ea typeface="Microsoft JhengHei" pitchFamily="34" charset="-120"/>
-              </a:rPr>
-              <a:t>美歌時</a:t>
+              <a:t>在我心裡常吟讚美歌時</a:t>
             </a:r>
             <a:endParaRPr lang="en-US" altLang="zh-TW" sz="4800" b="1" dirty="0">
               <a:solidFill>
@@ -3572,54 +3505,14 @@
               <a:buNone/>
             </a:pPr>
             <a:r>
-              <a:rPr lang="zh-TW" altLang="en-US" sz="4800" b="1" dirty="0" smtClean="0">
+              <a:rPr lang="zh-TW" altLang="en-US" sz="4800" b="1" dirty="0">
                 <a:solidFill>
                   <a:srgbClr val="000066"/>
                 </a:solidFill>
                 <a:latin typeface="Microsoft JhengHei" pitchFamily="34" charset="-120"/>
                 <a:ea typeface="Microsoft JhengHei" pitchFamily="34" charset="-120"/>
               </a:rPr>
-              <a:t>常</a:t>
-            </a:r>
-            <a:r>
-              <a:rPr lang="zh-TW" altLang="en-US" sz="4800" b="1" dirty="0">
-                <a:solidFill>
-                  <a:srgbClr val="000066"/>
-                </a:solidFill>
-                <a:latin typeface="Microsoft JhengHei" pitchFamily="34" charset="-120"/>
-                <a:ea typeface="Microsoft JhengHei" pitchFamily="34" charset="-120"/>
-              </a:rPr>
-              <a:t>吟奇妙</a:t>
-            </a:r>
-            <a:r>
-              <a:rPr lang="zh-TW" altLang="en-US" sz="4800" b="1" dirty="0" smtClean="0">
-                <a:solidFill>
-                  <a:srgbClr val="000066"/>
-                </a:solidFill>
-                <a:latin typeface="Microsoft JhengHei" pitchFamily="34" charset="-120"/>
-                <a:ea typeface="Microsoft JhengHei" pitchFamily="34" charset="-120"/>
-              </a:rPr>
-              <a:t>歌  </a:t>
-            </a:r>
-            <a:r>
-              <a:rPr lang="zh-TW" altLang="en-US" sz="4800" b="1" dirty="0" smtClean="0">
-                <a:solidFill>
-                  <a:srgbClr val="000066"/>
-                </a:solidFill>
-                <a:latin typeface="Microsoft JhengHei" pitchFamily="34" charset="-120"/>
-                <a:ea typeface="Microsoft JhengHei" pitchFamily="34" charset="-120"/>
-              </a:rPr>
-              <a:t> 像</a:t>
-            </a:r>
-            <a:r>
-              <a:rPr lang="zh-TW" altLang="en-US" sz="4800" b="1" dirty="0">
-                <a:solidFill>
-                  <a:srgbClr val="000066"/>
-                </a:solidFill>
-                <a:latin typeface="Microsoft JhengHei" pitchFamily="34" charset="-120"/>
-                <a:ea typeface="Microsoft JhengHei" pitchFamily="34" charset="-120"/>
-              </a:rPr>
-              <a:t>天使同唱和</a:t>
+              <a:t>常吟奇妙歌   像天使同唱和</a:t>
             </a:r>
           </a:p>
         </p:txBody>
@@ -3634,13 +3527,6 @@
   <p:clrMapOvr>
     <a:masterClrMapping/>
   </p:clrMapOvr>
-  <p:timing>
-    <p:tnLst>
-      <p:par>
-        <p:cTn id="1" dur="indefinite" restart="never" nodeType="tmRoot"/>
-      </p:par>
-    </p:tnLst>
-  </p:timing>
 </p:sld>
 </file>
 
@@ -3694,17 +3580,7 @@
                 <a:latin typeface="Microsoft JhengHei" pitchFamily="34" charset="-120"/>
                 <a:ea typeface="Microsoft JhengHei" pitchFamily="34" charset="-120"/>
               </a:rPr>
-              <a:t>在我心裡常吟讚</a:t>
-            </a:r>
-            <a:r>
-              <a:rPr lang="zh-TW" altLang="en-US" sz="4800" b="1" dirty="0">
-                <a:solidFill>
-                  <a:srgbClr val="000066"/>
-                </a:solidFill>
-                <a:latin typeface="Microsoft JhengHei" pitchFamily="34" charset="-120"/>
-                <a:ea typeface="Microsoft JhengHei" pitchFamily="34" charset="-120"/>
-              </a:rPr>
-              <a:t>美歌時</a:t>
+              <a:t>在我心裡常吟讚美歌時</a:t>
             </a:r>
             <a:endParaRPr lang="en-US" altLang="zh-TW" sz="4800" b="1" dirty="0">
               <a:solidFill>
@@ -3719,24 +3595,14 @@
               <a:buNone/>
             </a:pPr>
             <a:r>
-              <a:rPr lang="zh-TW" altLang="en-US" sz="4800" b="1" dirty="0" smtClean="0">
+              <a:rPr lang="zh-TW" altLang="en-US" sz="4800" b="1" dirty="0">
                 <a:solidFill>
                   <a:srgbClr val="000066"/>
                 </a:solidFill>
                 <a:latin typeface="Microsoft JhengHei" pitchFamily="34" charset="-120"/>
                 <a:ea typeface="Microsoft JhengHei" pitchFamily="34" charset="-120"/>
               </a:rPr>
-              <a:t>常</a:t>
-            </a:r>
-            <a:r>
-              <a:rPr lang="zh-TW" altLang="en-US" sz="4800" b="1" dirty="0">
-                <a:solidFill>
-                  <a:srgbClr val="000066"/>
-                </a:solidFill>
-                <a:latin typeface="Microsoft JhengHei" pitchFamily="34" charset="-120"/>
-                <a:ea typeface="Microsoft JhengHei" pitchFamily="34" charset="-120"/>
-              </a:rPr>
-              <a:t>吟奇妙恩愛歌</a:t>
+              <a:t>常吟奇妙恩愛歌</a:t>
             </a:r>
           </a:p>
         </p:txBody>
@@ -3751,13 +3617,6 @@
   <p:clrMapOvr>
     <a:masterClrMapping/>
   </p:clrMapOvr>
-  <p:timing>
-    <p:tnLst>
-      <p:par>
-        <p:cTn id="1" dur="indefinite" restart="never" nodeType="tmRoot"/>
-      </p:par>
-    </p:tnLst>
-  </p:timing>
 </p:sld>
 </file>
 
@@ -3869,12 +3728,12 @@
           <a:p>
             <a:pPr algn="ctr"/>
             <a:r>
-              <a:rPr lang="en-US" sz="3600" b="1" dirty="0" smtClean="0">
+              <a:rPr lang="en-US" sz="3600" b="1" dirty="0">
                 <a:solidFill>
                   <a:srgbClr val="000066"/>
                 </a:solidFill>
               </a:rPr>
-              <a:t>( 1 )</a:t>
+              <a:t>( 1 / 3 )</a:t>
             </a:r>
             <a:endParaRPr lang="vi-VN" sz="3600" b="1" dirty="0">
               <a:solidFill>
@@ -3894,13 +3753,6 @@
   <p:clrMapOvr>
     <a:masterClrMapping/>
   </p:clrMapOvr>
-  <p:timing>
-    <p:tnLst>
-      <p:par>
-        <p:cTn id="1" dur="indefinite" restart="never" nodeType="tmRoot"/>
-      </p:par>
-    </p:tnLst>
-  </p:timing>
 </p:sld>
 </file>
 
@@ -4005,12 +3857,12 @@
           <a:p>
             <a:pPr algn="ctr"/>
             <a:r>
-              <a:rPr lang="en-US" sz="3600" b="1" dirty="0" smtClean="0">
+              <a:rPr lang="en-US" sz="3600" b="1" dirty="0">
                 <a:solidFill>
                   <a:srgbClr val="000066"/>
                 </a:solidFill>
               </a:rPr>
-              <a:t>( 1 )</a:t>
+              <a:t>( 1 / 3 )</a:t>
             </a:r>
             <a:endParaRPr lang="vi-VN" sz="3600" b="1" dirty="0">
               <a:solidFill>
@@ -4030,13 +3882,6 @@
   <p:clrMapOvr>
     <a:masterClrMapping/>
   </p:clrMapOvr>
-  <p:timing>
-    <p:tnLst>
-      <p:par>
-        <p:cTn id="1" dur="indefinite" restart="never" nodeType="tmRoot"/>
-      </p:par>
-    </p:tnLst>
-  </p:timing>
 </p:sld>
 </file>
 
@@ -4090,17 +3935,7 @@
                 <a:latin typeface="Microsoft JhengHei" pitchFamily="34" charset="-120"/>
                 <a:ea typeface="Microsoft JhengHei" pitchFamily="34" charset="-120"/>
               </a:rPr>
-              <a:t>在我心裡常吟讚</a:t>
-            </a:r>
-            <a:r>
-              <a:rPr lang="zh-TW" altLang="en-US" sz="4800" b="1" dirty="0">
-                <a:solidFill>
-                  <a:srgbClr val="000066"/>
-                </a:solidFill>
-                <a:latin typeface="Microsoft JhengHei" pitchFamily="34" charset="-120"/>
-                <a:ea typeface="Microsoft JhengHei" pitchFamily="34" charset="-120"/>
-              </a:rPr>
-              <a:t>美歌時</a:t>
+              <a:t>在我心裡常吟讚美歌時</a:t>
             </a:r>
             <a:endParaRPr lang="en-US" altLang="zh-TW" sz="4800" b="1" dirty="0">
               <a:solidFill>
@@ -4115,54 +3950,14 @@
               <a:buNone/>
             </a:pPr>
             <a:r>
-              <a:rPr lang="zh-TW" altLang="en-US" sz="4800" b="1" dirty="0" smtClean="0">
+              <a:rPr lang="zh-TW" altLang="en-US" sz="4800" b="1" dirty="0">
                 <a:solidFill>
                   <a:srgbClr val="000066"/>
                 </a:solidFill>
                 <a:latin typeface="Microsoft JhengHei" pitchFamily="34" charset="-120"/>
                 <a:ea typeface="Microsoft JhengHei" pitchFamily="34" charset="-120"/>
               </a:rPr>
-              <a:t>常</a:t>
-            </a:r>
-            <a:r>
-              <a:rPr lang="zh-TW" altLang="en-US" sz="4800" b="1" dirty="0">
-                <a:solidFill>
-                  <a:srgbClr val="000066"/>
-                </a:solidFill>
-                <a:latin typeface="Microsoft JhengHei" pitchFamily="34" charset="-120"/>
-                <a:ea typeface="Microsoft JhengHei" pitchFamily="34" charset="-120"/>
-              </a:rPr>
-              <a:t>吟奇妙</a:t>
-            </a:r>
-            <a:r>
-              <a:rPr lang="zh-TW" altLang="en-US" sz="4800" b="1" dirty="0" smtClean="0">
-                <a:solidFill>
-                  <a:srgbClr val="000066"/>
-                </a:solidFill>
-                <a:latin typeface="Microsoft JhengHei" pitchFamily="34" charset="-120"/>
-                <a:ea typeface="Microsoft JhengHei" pitchFamily="34" charset="-120"/>
-              </a:rPr>
-              <a:t>歌  </a:t>
-            </a:r>
-            <a:r>
-              <a:rPr lang="zh-TW" altLang="en-US" sz="4800" b="1" dirty="0" smtClean="0">
-                <a:solidFill>
-                  <a:srgbClr val="000066"/>
-                </a:solidFill>
-                <a:latin typeface="Microsoft JhengHei" pitchFamily="34" charset="-120"/>
-                <a:ea typeface="Microsoft JhengHei" pitchFamily="34" charset="-120"/>
-              </a:rPr>
-              <a:t> 像</a:t>
-            </a:r>
-            <a:r>
-              <a:rPr lang="zh-TW" altLang="en-US" sz="4800" b="1" dirty="0">
-                <a:solidFill>
-                  <a:srgbClr val="000066"/>
-                </a:solidFill>
-                <a:latin typeface="Microsoft JhengHei" pitchFamily="34" charset="-120"/>
-                <a:ea typeface="Microsoft JhengHei" pitchFamily="34" charset="-120"/>
-              </a:rPr>
-              <a:t>天使同唱和</a:t>
+              <a:t>常吟奇妙歌   像天使同唱和</a:t>
             </a:r>
           </a:p>
         </p:txBody>
@@ -4177,13 +3972,6 @@
   <p:clrMapOvr>
     <a:masterClrMapping/>
   </p:clrMapOvr>
-  <p:timing>
-    <p:tnLst>
-      <p:par>
-        <p:cTn id="1" dur="indefinite" restart="never" nodeType="tmRoot"/>
-      </p:par>
-    </p:tnLst>
-  </p:timing>
 </p:sld>
 </file>
 
@@ -4237,17 +4025,7 @@
                 <a:latin typeface="Microsoft JhengHei" pitchFamily="34" charset="-120"/>
                 <a:ea typeface="Microsoft JhengHei" pitchFamily="34" charset="-120"/>
               </a:rPr>
-              <a:t>在我心裡常吟讚</a:t>
-            </a:r>
-            <a:r>
-              <a:rPr lang="zh-TW" altLang="en-US" sz="4800" b="1" dirty="0">
-                <a:solidFill>
-                  <a:srgbClr val="000066"/>
-                </a:solidFill>
-                <a:latin typeface="Microsoft JhengHei" pitchFamily="34" charset="-120"/>
-                <a:ea typeface="Microsoft JhengHei" pitchFamily="34" charset="-120"/>
-              </a:rPr>
-              <a:t>美歌時</a:t>
+              <a:t>在我心裡常吟讚美歌時</a:t>
             </a:r>
             <a:endParaRPr lang="en-US" altLang="zh-TW" sz="4800" b="1" dirty="0">
               <a:solidFill>
@@ -4262,24 +4040,14 @@
               <a:buNone/>
             </a:pPr>
             <a:r>
-              <a:rPr lang="zh-TW" altLang="en-US" sz="4800" b="1" dirty="0" smtClean="0">
+              <a:rPr lang="zh-TW" altLang="en-US" sz="4800" b="1" dirty="0">
                 <a:solidFill>
                   <a:srgbClr val="000066"/>
                 </a:solidFill>
                 <a:latin typeface="Microsoft JhengHei" pitchFamily="34" charset="-120"/>
                 <a:ea typeface="Microsoft JhengHei" pitchFamily="34" charset="-120"/>
               </a:rPr>
-              <a:t>常</a:t>
-            </a:r>
-            <a:r>
-              <a:rPr lang="zh-TW" altLang="en-US" sz="4800" b="1" dirty="0">
-                <a:solidFill>
-                  <a:srgbClr val="000066"/>
-                </a:solidFill>
-                <a:latin typeface="Microsoft JhengHei" pitchFamily="34" charset="-120"/>
-                <a:ea typeface="Microsoft JhengHei" pitchFamily="34" charset="-120"/>
-              </a:rPr>
-              <a:t>吟奇妙恩愛歌</a:t>
+              <a:t>常吟奇妙恩愛歌</a:t>
             </a:r>
           </a:p>
         </p:txBody>
@@ -4294,13 +4062,6 @@
   <p:clrMapOvr>
     <a:masterClrMapping/>
   </p:clrMapOvr>
-  <p:timing>
-    <p:tnLst>
-      <p:par>
-        <p:cTn id="1" dur="indefinite" restart="never" nodeType="tmRoot"/>
-      </p:par>
-    </p:tnLst>
-  </p:timing>
 </p:sld>
 </file>
 
@@ -4412,12 +4173,12 @@
           <a:p>
             <a:pPr algn="ctr"/>
             <a:r>
-              <a:rPr lang="en-US" sz="3600" b="1" dirty="0" smtClean="0">
+              <a:rPr lang="en-US" sz="3600" b="1" dirty="0">
                 <a:solidFill>
                   <a:srgbClr val="000066"/>
                 </a:solidFill>
               </a:rPr>
-              <a:t>( 2 )</a:t>
+              <a:t>( 2 / 3 )</a:t>
             </a:r>
             <a:endParaRPr lang="vi-VN" sz="3600" b="1" dirty="0">
               <a:solidFill>
@@ -4437,13 +4198,6 @@
   <p:clrMapOvr>
     <a:masterClrMapping/>
   </p:clrMapOvr>
-  <p:timing>
-    <p:tnLst>
-      <p:par>
-        <p:cTn id="1" dur="indefinite" restart="never" nodeType="tmRoot"/>
-      </p:par>
-    </p:tnLst>
-  </p:timing>
 </p:sld>
 </file>
 
@@ -4548,12 +4302,12 @@
           <a:p>
             <a:pPr algn="ctr"/>
             <a:r>
-              <a:rPr lang="en-US" sz="3600" b="1" dirty="0" smtClean="0">
+              <a:rPr lang="en-US" sz="3600" b="1" dirty="0">
                 <a:solidFill>
                   <a:srgbClr val="000066"/>
                 </a:solidFill>
               </a:rPr>
-              <a:t>( 2 )</a:t>
+              <a:t>( 2 / 3 )</a:t>
             </a:r>
             <a:endParaRPr lang="vi-VN" sz="3600" b="1" dirty="0">
               <a:solidFill>
@@ -4573,13 +4327,6 @@
   <p:clrMapOvr>
     <a:masterClrMapping/>
   </p:clrMapOvr>
-  <p:timing>
-    <p:tnLst>
-      <p:par>
-        <p:cTn id="1" dur="indefinite" restart="never" nodeType="tmRoot"/>
-      </p:par>
-    </p:tnLst>
-  </p:timing>
 </p:sld>
 </file>
 
@@ -4633,17 +4380,7 @@
                 <a:latin typeface="Microsoft JhengHei" pitchFamily="34" charset="-120"/>
                 <a:ea typeface="Microsoft JhengHei" pitchFamily="34" charset="-120"/>
               </a:rPr>
-              <a:t>在我心裡常吟讚</a:t>
-            </a:r>
-            <a:r>
-              <a:rPr lang="zh-TW" altLang="en-US" sz="4800" b="1" dirty="0">
-                <a:solidFill>
-                  <a:srgbClr val="000066"/>
-                </a:solidFill>
-                <a:latin typeface="Microsoft JhengHei" pitchFamily="34" charset="-120"/>
-                <a:ea typeface="Microsoft JhengHei" pitchFamily="34" charset="-120"/>
-              </a:rPr>
-              <a:t>美歌時</a:t>
+              <a:t>在我心裡常吟讚美歌時</a:t>
             </a:r>
             <a:endParaRPr lang="en-US" altLang="zh-TW" sz="4800" b="1" dirty="0">
               <a:solidFill>
@@ -4658,54 +4395,14 @@
               <a:buNone/>
             </a:pPr>
             <a:r>
-              <a:rPr lang="zh-TW" altLang="en-US" sz="4800" b="1" dirty="0" smtClean="0">
+              <a:rPr lang="zh-TW" altLang="en-US" sz="4800" b="1" dirty="0">
                 <a:solidFill>
                   <a:srgbClr val="000066"/>
                 </a:solidFill>
                 <a:latin typeface="Microsoft JhengHei" pitchFamily="34" charset="-120"/>
                 <a:ea typeface="Microsoft JhengHei" pitchFamily="34" charset="-120"/>
               </a:rPr>
-              <a:t>常</a:t>
-            </a:r>
-            <a:r>
-              <a:rPr lang="zh-TW" altLang="en-US" sz="4800" b="1" dirty="0">
-                <a:solidFill>
-                  <a:srgbClr val="000066"/>
-                </a:solidFill>
-                <a:latin typeface="Microsoft JhengHei" pitchFamily="34" charset="-120"/>
-                <a:ea typeface="Microsoft JhengHei" pitchFamily="34" charset="-120"/>
-              </a:rPr>
-              <a:t>吟奇妙</a:t>
-            </a:r>
-            <a:r>
-              <a:rPr lang="zh-TW" altLang="en-US" sz="4800" b="1" dirty="0" smtClean="0">
-                <a:solidFill>
-                  <a:srgbClr val="000066"/>
-                </a:solidFill>
-                <a:latin typeface="Microsoft JhengHei" pitchFamily="34" charset="-120"/>
-                <a:ea typeface="Microsoft JhengHei" pitchFamily="34" charset="-120"/>
-              </a:rPr>
-              <a:t>歌  </a:t>
-            </a:r>
-            <a:r>
-              <a:rPr lang="zh-TW" altLang="en-US" sz="4800" b="1" dirty="0" smtClean="0">
-                <a:solidFill>
-                  <a:srgbClr val="000066"/>
-                </a:solidFill>
-                <a:latin typeface="Microsoft JhengHei" pitchFamily="34" charset="-120"/>
-                <a:ea typeface="Microsoft JhengHei" pitchFamily="34" charset="-120"/>
-              </a:rPr>
-              <a:t> 像</a:t>
-            </a:r>
-            <a:r>
-              <a:rPr lang="zh-TW" altLang="en-US" sz="4800" b="1" dirty="0">
-                <a:solidFill>
-                  <a:srgbClr val="000066"/>
-                </a:solidFill>
-                <a:latin typeface="Microsoft JhengHei" pitchFamily="34" charset="-120"/>
-                <a:ea typeface="Microsoft JhengHei" pitchFamily="34" charset="-120"/>
-              </a:rPr>
-              <a:t>天使同唱和</a:t>
+              <a:t>常吟奇妙歌   像天使同唱和</a:t>
             </a:r>
           </a:p>
         </p:txBody>
@@ -4720,13 +4417,6 @@
   <p:clrMapOvr>
     <a:masterClrMapping/>
   </p:clrMapOvr>
-  <p:timing>
-    <p:tnLst>
-      <p:par>
-        <p:cTn id="1" dur="indefinite" restart="never" nodeType="tmRoot"/>
-      </p:par>
-    </p:tnLst>
-  </p:timing>
 </p:sld>
 </file>
 
@@ -4780,17 +4470,7 @@
                 <a:latin typeface="Microsoft JhengHei" pitchFamily="34" charset="-120"/>
                 <a:ea typeface="Microsoft JhengHei" pitchFamily="34" charset="-120"/>
               </a:rPr>
-              <a:t>在我心裡常吟讚</a:t>
-            </a:r>
-            <a:r>
-              <a:rPr lang="zh-TW" altLang="en-US" sz="4800" b="1" dirty="0">
-                <a:solidFill>
-                  <a:srgbClr val="000066"/>
-                </a:solidFill>
-                <a:latin typeface="Microsoft JhengHei" pitchFamily="34" charset="-120"/>
-                <a:ea typeface="Microsoft JhengHei" pitchFamily="34" charset="-120"/>
-              </a:rPr>
-              <a:t>美歌時</a:t>
+              <a:t>在我心裡常吟讚美歌時</a:t>
             </a:r>
             <a:endParaRPr lang="en-US" altLang="zh-TW" sz="4800" b="1" dirty="0">
               <a:solidFill>
@@ -4805,24 +4485,14 @@
               <a:buNone/>
             </a:pPr>
             <a:r>
-              <a:rPr lang="zh-TW" altLang="en-US" sz="4800" b="1" dirty="0" smtClean="0">
+              <a:rPr lang="zh-TW" altLang="en-US" sz="4800" b="1" dirty="0">
                 <a:solidFill>
                   <a:srgbClr val="000066"/>
                 </a:solidFill>
                 <a:latin typeface="Microsoft JhengHei" pitchFamily="34" charset="-120"/>
                 <a:ea typeface="Microsoft JhengHei" pitchFamily="34" charset="-120"/>
               </a:rPr>
-              <a:t>常</a:t>
-            </a:r>
-            <a:r>
-              <a:rPr lang="zh-TW" altLang="en-US" sz="4800" b="1" dirty="0">
-                <a:solidFill>
-                  <a:srgbClr val="000066"/>
-                </a:solidFill>
-                <a:latin typeface="Microsoft JhengHei" pitchFamily="34" charset="-120"/>
-                <a:ea typeface="Microsoft JhengHei" pitchFamily="34" charset="-120"/>
-              </a:rPr>
-              <a:t>吟奇妙恩愛歌</a:t>
+              <a:t>常吟奇妙恩愛歌</a:t>
             </a:r>
           </a:p>
         </p:txBody>
@@ -4837,13 +4507,6 @@
   <p:clrMapOvr>
     <a:masterClrMapping/>
   </p:clrMapOvr>
-  <p:timing>
-    <p:tnLst>
-      <p:par>
-        <p:cTn id="1" dur="indefinite" restart="never" nodeType="tmRoot"/>
-      </p:par>
-    </p:tnLst>
-  </p:timing>
 </p:sld>
 </file>
 
